--- a/Diagram_AI_Generation_Literature_Review.pptx
+++ b/Diagram_AI_Generation_Literature_Review.pptx
@@ -5,7 +5,7 @@
     <p:sldMasterId id="2147483648" r:id="rId1"/>
   </p:sldMasterIdLst>
   <p:notesMasterIdLst>
-    <p:notesMasterId r:id="rId28"/>
+    <p:notesMasterId r:id="rId29"/>
   </p:notesMasterIdLst>
   <p:sldIdLst>
     <p:sldId id="256" r:id="rId2"/>
@@ -33,7 +33,8 @@
     <p:sldId id="300" r:id="rId24"/>
     <p:sldId id="301" r:id="rId25"/>
     <p:sldId id="302" r:id="rId26"/>
-    <p:sldId id="293" r:id="rId27"/>
+    <p:sldId id="303" r:id="rId27"/>
+    <p:sldId id="293" r:id="rId28"/>
   </p:sldIdLst>
   <p:sldSz cx="12192000" cy="6858000"/>
   <p:notesSz cx="6858000" cy="9144000"/>
@@ -222,7 +223,7 @@
           <a:p>
             <a:fld id="{FF508601-E061-4AE8-949A-AA35F03A77CB}" type="datetimeFigureOut">
               <a:rPr lang="en-US" smtClean="0"/>
-              <a:t>3/5/2026</a:t>
+              <a:t>3/19/2026</a:t>
             </a:fld>
             <a:endParaRPr lang="en-US"/>
           </a:p>
@@ -2574,7 +2575,7 @@
           <a:p>
             <a:fld id="{EBADDE44-2A96-4951-86B4-5BB434E9B9D5}" type="datetimeFigureOut">
               <a:rPr lang="en-US" smtClean="0"/>
-              <a:t>3/5/2026</a:t>
+              <a:t>3/19/2026</a:t>
             </a:fld>
             <a:endParaRPr lang="en-US"/>
           </a:p>
@@ -2772,7 +2773,7 @@
           <a:p>
             <a:fld id="{EBADDE44-2A96-4951-86B4-5BB434E9B9D5}" type="datetimeFigureOut">
               <a:rPr lang="en-US" smtClean="0"/>
-              <a:t>3/5/2026</a:t>
+              <a:t>3/19/2026</a:t>
             </a:fld>
             <a:endParaRPr lang="en-US"/>
           </a:p>
@@ -2980,7 +2981,7 @@
           <a:p>
             <a:fld id="{EBADDE44-2A96-4951-86B4-5BB434E9B9D5}" type="datetimeFigureOut">
               <a:rPr lang="en-US" smtClean="0"/>
-              <a:t>3/5/2026</a:t>
+              <a:t>3/19/2026</a:t>
             </a:fld>
             <a:endParaRPr lang="en-US"/>
           </a:p>
@@ -3537,7 +3538,7 @@
           <a:p>
             <a:fld id="{EBADDE44-2A96-4951-86B4-5BB434E9B9D5}" type="datetimeFigureOut">
               <a:rPr lang="en-US" smtClean="0"/>
-              <a:t>3/5/2026</a:t>
+              <a:t>3/19/2026</a:t>
             </a:fld>
             <a:endParaRPr lang="en-US"/>
           </a:p>
@@ -3812,7 +3813,7 @@
           <a:p>
             <a:fld id="{EBADDE44-2A96-4951-86B4-5BB434E9B9D5}" type="datetimeFigureOut">
               <a:rPr lang="en-US" smtClean="0"/>
-              <a:t>3/5/2026</a:t>
+              <a:t>3/19/2026</a:t>
             </a:fld>
             <a:endParaRPr lang="en-US"/>
           </a:p>
@@ -4077,7 +4078,7 @@
           <a:p>
             <a:fld id="{EBADDE44-2A96-4951-86B4-5BB434E9B9D5}" type="datetimeFigureOut">
               <a:rPr lang="en-US" smtClean="0"/>
-              <a:t>3/5/2026</a:t>
+              <a:t>3/19/2026</a:t>
             </a:fld>
             <a:endParaRPr lang="en-US"/>
           </a:p>
@@ -4489,7 +4490,7 @@
           <a:p>
             <a:fld id="{EBADDE44-2A96-4951-86B4-5BB434E9B9D5}" type="datetimeFigureOut">
               <a:rPr lang="en-US" smtClean="0"/>
-              <a:t>3/5/2026</a:t>
+              <a:t>3/19/2026</a:t>
             </a:fld>
             <a:endParaRPr lang="en-US"/>
           </a:p>
@@ -4630,7 +4631,7 @@
           <a:p>
             <a:fld id="{EBADDE44-2A96-4951-86B4-5BB434E9B9D5}" type="datetimeFigureOut">
               <a:rPr lang="en-US" smtClean="0"/>
-              <a:t>3/5/2026</a:t>
+              <a:t>3/19/2026</a:t>
             </a:fld>
             <a:endParaRPr lang="en-US"/>
           </a:p>
@@ -4743,7 +4744,7 @@
           <a:p>
             <a:fld id="{EBADDE44-2A96-4951-86B4-5BB434E9B9D5}" type="datetimeFigureOut">
               <a:rPr lang="en-US" smtClean="0"/>
-              <a:t>3/5/2026</a:t>
+              <a:t>3/19/2026</a:t>
             </a:fld>
             <a:endParaRPr lang="en-US"/>
           </a:p>
@@ -5054,7 +5055,7 @@
           <a:p>
             <a:fld id="{EBADDE44-2A96-4951-86B4-5BB434E9B9D5}" type="datetimeFigureOut">
               <a:rPr lang="en-US" smtClean="0"/>
-              <a:t>3/5/2026</a:t>
+              <a:t>3/19/2026</a:t>
             </a:fld>
             <a:endParaRPr lang="en-US"/>
           </a:p>
@@ -5342,7 +5343,7 @@
           <a:p>
             <a:fld id="{EBADDE44-2A96-4951-86B4-5BB434E9B9D5}" type="datetimeFigureOut">
               <a:rPr lang="en-US" smtClean="0"/>
-              <a:t>3/5/2026</a:t>
+              <a:t>3/19/2026</a:t>
             </a:fld>
             <a:endParaRPr lang="en-US"/>
           </a:p>
@@ -5583,7 +5584,7 @@
           <a:p>
             <a:fld id="{EBADDE44-2A96-4951-86B4-5BB434E9B9D5}" type="datetimeFigureOut">
               <a:rPr lang="en-US" smtClean="0"/>
-              <a:t>3/5/2026</a:t>
+              <a:t>3/19/2026</a:t>
             </a:fld>
             <a:endParaRPr lang="en-US"/>
           </a:p>
@@ -12565,8 +12566,8 @@
             </a:p>
           </p:txBody>
         </p:sp>
-        <mc:AlternateContent xmlns:mc="http://schemas.openxmlformats.org/markup-compatibility/2006">
-          <mc:Choice xmlns:a14="http://schemas.microsoft.com/office/drawing/2010/main" Requires="a14">
+        <mc:AlternateContent xmlns:mc="http://schemas.openxmlformats.org/markup-compatibility/2006" xmlns:a14="http://schemas.microsoft.com/office/drawing/2010/main">
+          <mc:Choice Requires="a14">
             <p:sp>
               <p:nvSpPr>
                 <p:cNvPr id="15" name="TextBox 14">
@@ -12642,7 +12643,7 @@
               </p:txBody>
             </p:sp>
           </mc:Choice>
-          <mc:Fallback>
+          <mc:Fallback xmlns="">
             <p:sp>
               <p:nvSpPr>
                 <p:cNvPr id="15" name="TextBox 14">
@@ -12752,8 +12753,8 @@
             </a:p>
           </p:txBody>
         </p:sp>
-        <mc:AlternateContent xmlns:mc="http://schemas.openxmlformats.org/markup-compatibility/2006">
-          <mc:Choice xmlns:a14="http://schemas.microsoft.com/office/drawing/2010/main" Requires="a14">
+        <mc:AlternateContent xmlns:mc="http://schemas.openxmlformats.org/markup-compatibility/2006" xmlns:a14="http://schemas.microsoft.com/office/drawing/2010/main">
+          <mc:Choice Requires="a14">
             <p:sp>
               <p:nvSpPr>
                 <p:cNvPr id="10" name="TextBox 9">
@@ -12831,7 +12832,7 @@
               </p:txBody>
             </p:sp>
           </mc:Choice>
-          <mc:Fallback>
+          <mc:Fallback xmlns="">
             <p:sp>
               <p:nvSpPr>
                 <p:cNvPr id="10" name="TextBox 9">
@@ -13294,7 +13295,7 @@
             </a:r>
             <a:r>
               <a:rPr lang="en-US" dirty="0"/>
-              <a:t> summaries instead. </a:t>
+              <a:t> summaries instead – Adding packet extraction.</a:t>
             </a:r>
           </a:p>
           <a:p>
@@ -13316,6 +13317,269 @@
 </file>
 
 <file path=ppt/slides/slide26.xml><?xml version="1.0" encoding="utf-8"?>
+<p:sld xmlns:a="http://schemas.openxmlformats.org/drawingml/2006/main" xmlns:r="http://schemas.openxmlformats.org/officeDocument/2006/relationships" xmlns:p="http://schemas.openxmlformats.org/presentationml/2006/main">
+  <p:cSld>
+    <p:spTree>
+      <p:nvGrpSpPr>
+        <p:cNvPr id="1" name="">
+          <a:extLst>
+            <a:ext uri="{FF2B5EF4-FFF2-40B4-BE49-F238E27FC236}">
+              <a16:creationId xmlns:a16="http://schemas.microsoft.com/office/drawing/2014/main" id="{D6F97962-95B7-587A-1B1E-02D3B7F93FA7}"/>
+            </a:ext>
+          </a:extLst>
+        </p:cNvPr>
+        <p:cNvGrpSpPr/>
+        <p:nvPr/>
+      </p:nvGrpSpPr>
+      <p:grpSpPr>
+        <a:xfrm>
+          <a:off x="0" y="0"/>
+          <a:ext cx="0" cy="0"/>
+          <a:chOff x="0" y="0"/>
+          <a:chExt cx="0" cy="0"/>
+        </a:xfrm>
+      </p:grpSpPr>
+      <p:sp>
+        <p:nvSpPr>
+          <p:cNvPr id="2" name="Title 1">
+            <a:extLst>
+              <a:ext uri="{FF2B5EF4-FFF2-40B4-BE49-F238E27FC236}">
+                <a16:creationId xmlns:a16="http://schemas.microsoft.com/office/drawing/2014/main" id="{7A3859F6-28AE-AE11-647B-92B5001091FD}"/>
+              </a:ext>
+            </a:extLst>
+          </p:cNvPr>
+          <p:cNvSpPr>
+            <a:spLocks noGrp="1"/>
+          </p:cNvSpPr>
+          <p:nvPr>
+            <p:ph type="title"/>
+          </p:nvPr>
+        </p:nvSpPr>
+        <p:spPr/>
+        <p:txBody>
+          <a:bodyPr/>
+          <a:lstStyle/>
+          <a:p>
+            <a:r>
+              <a:rPr lang="en-US" b="1" dirty="0">
+                <a:solidFill>
+                  <a:srgbClr val="A02B93"/>
+                </a:solidFill>
+              </a:rPr>
+              <a:t>Packet Extraction</a:t>
+            </a:r>
+            <a:endParaRPr lang="en-US" dirty="0"/>
+          </a:p>
+        </p:txBody>
+      </p:sp>
+      <p:sp>
+        <p:nvSpPr>
+          <p:cNvPr id="3" name="Content Placeholder 2">
+            <a:extLst>
+              <a:ext uri="{FF2B5EF4-FFF2-40B4-BE49-F238E27FC236}">
+                <a16:creationId xmlns:a16="http://schemas.microsoft.com/office/drawing/2014/main" id="{EA48EACB-2A6F-2577-010F-BAD247DBDA10}"/>
+              </a:ext>
+            </a:extLst>
+          </p:cNvPr>
+          <p:cNvSpPr>
+            <a:spLocks noGrp="1"/>
+          </p:cNvSpPr>
+          <p:nvPr>
+            <p:ph idx="1"/>
+          </p:nvPr>
+        </p:nvSpPr>
+        <p:spPr/>
+        <p:txBody>
+          <a:bodyPr>
+            <a:normAutofit fontScale="85000" lnSpcReduction="20000"/>
+          </a:bodyPr>
+          <a:lstStyle/>
+          <a:p>
+            <a:pPr marL="0" indent="0">
+              <a:buNone/>
+            </a:pPr>
+            <a:r>
+              <a:rPr lang="en-US" b="1" dirty="0">
+                <a:solidFill>
+                  <a:srgbClr val="9900CC"/>
+                </a:solidFill>
+              </a:rPr>
+              <a:t>Noise Removal:</a:t>
+            </a:r>
+          </a:p>
+          <a:p>
+            <a:r>
+              <a:rPr lang="en-US" dirty="0"/>
+              <a:t>Remove Packets that have no IP layer (2</a:t>
+            </a:r>
+            <a:r>
+              <a:rPr lang="en-US" baseline="30000" dirty="0"/>
+              <a:t>nd</a:t>
+            </a:r>
+            <a:r>
+              <a:rPr lang="en-US" dirty="0"/>
+              <a:t> layer, ARP)</a:t>
+            </a:r>
+          </a:p>
+          <a:p>
+            <a:r>
+              <a:rPr lang="en-US" dirty="0"/>
+              <a:t>Remove ICMP layers</a:t>
+            </a:r>
+          </a:p>
+          <a:p>
+            <a:pPr marL="0" indent="0">
+              <a:buNone/>
+            </a:pPr>
+            <a:r>
+              <a:rPr lang="en-US" b="1" dirty="0">
+                <a:solidFill>
+                  <a:srgbClr val="9900CC"/>
+                </a:solidFill>
+              </a:rPr>
+              <a:t>Fingerprint: </a:t>
+            </a:r>
+          </a:p>
+          <a:p>
+            <a:r>
+              <a:rPr lang="en-US" dirty="0"/>
+              <a:t>TCP: Flags + </a:t>
+            </a:r>
+            <a:r>
+              <a:rPr lang="en-US" dirty="0" err="1"/>
+              <a:t>Dport</a:t>
+            </a:r>
+            <a:r>
+              <a:rPr lang="en-US" dirty="0"/>
+              <a:t> </a:t>
+            </a:r>
+          </a:p>
+          <a:p>
+            <a:r>
+              <a:rPr lang="en-US" dirty="0"/>
+              <a:t>UDP: </a:t>
+            </a:r>
+            <a:r>
+              <a:rPr lang="en-US" dirty="0" err="1"/>
+              <a:t>Dport</a:t>
+            </a:r>
+            <a:r>
+              <a:rPr lang="en-US" dirty="0"/>
+              <a:t> </a:t>
+            </a:r>
+          </a:p>
+          <a:p>
+            <a:r>
+              <a:rPr lang="en-US" dirty="0"/>
+              <a:t>DNS: Domain name </a:t>
+            </a:r>
+          </a:p>
+          <a:p>
+            <a:pPr marL="0" indent="0">
+              <a:buNone/>
+            </a:pPr>
+            <a:r>
+              <a:rPr lang="en-US" b="1" dirty="0">
+                <a:solidFill>
+                  <a:srgbClr val="9900CC"/>
+                </a:solidFill>
+              </a:rPr>
+              <a:t>Pattern Finding:</a:t>
+            </a:r>
+          </a:p>
+          <a:p>
+            <a:r>
+              <a:rPr lang="en-US" dirty="0"/>
+              <a:t>Pick at most </a:t>
+            </a:r>
+            <a:r>
+              <a:rPr lang="en-US" dirty="0" err="1">
+                <a:solidFill>
+                  <a:srgbClr val="C836B7"/>
+                </a:solidFill>
+              </a:rPr>
+              <a:t>sampling_limit</a:t>
+            </a:r>
+            <a:r>
+              <a:rPr lang="en-US" dirty="0"/>
+              <a:t>  packets with the same fingerprint</a:t>
+            </a:r>
+          </a:p>
+          <a:p>
+            <a:pPr marL="0" indent="0">
+              <a:buNone/>
+            </a:pPr>
+            <a:endParaRPr lang="en-US" dirty="0">
+              <a:solidFill>
+                <a:schemeClr val="accent5"/>
+              </a:solidFill>
+            </a:endParaRPr>
+          </a:p>
+          <a:p>
+            <a:pPr marL="0" indent="0">
+              <a:buNone/>
+            </a:pPr>
+            <a:r>
+              <a:rPr lang="en-US" b="1" dirty="0">
+                <a:solidFill>
+                  <a:schemeClr val="accent5"/>
+                </a:solidFill>
+              </a:rPr>
+              <a:t>Output a packet dictionary </a:t>
+            </a:r>
+          </a:p>
+          <a:p>
+            <a:pPr marL="0" indent="0">
+              <a:buNone/>
+            </a:pPr>
+            <a:endParaRPr lang="en-US" dirty="0"/>
+          </a:p>
+        </p:txBody>
+      </p:sp>
+      <p:pic>
+        <p:nvPicPr>
+          <p:cNvPr id="5" name="Picture 4">
+            <a:extLst>
+              <a:ext uri="{FF2B5EF4-FFF2-40B4-BE49-F238E27FC236}">
+                <a16:creationId xmlns:a16="http://schemas.microsoft.com/office/drawing/2014/main" id="{77331349-E153-B9EA-312C-C188037CCE69}"/>
+              </a:ext>
+            </a:extLst>
+          </p:cNvPr>
+          <p:cNvPicPr>
+            <a:picLocks noChangeAspect="1"/>
+          </p:cNvPicPr>
+          <p:nvPr/>
+        </p:nvPicPr>
+        <p:blipFill>
+          <a:blip r:embed="rId2"/>
+          <a:stretch>
+            <a:fillRect/>
+          </a:stretch>
+        </p:blipFill>
+        <p:spPr>
+          <a:xfrm>
+            <a:off x="8438859" y="1891334"/>
+            <a:ext cx="3554470" cy="2109960"/>
+          </a:xfrm>
+          <a:prstGeom prst="rect">
+            <a:avLst/>
+          </a:prstGeom>
+        </p:spPr>
+      </p:pic>
+    </p:spTree>
+    <p:extLst>
+      <p:ext uri="{BB962C8B-B14F-4D97-AF65-F5344CB8AC3E}">
+        <p14:creationId xmlns:p14="http://schemas.microsoft.com/office/powerpoint/2010/main" val="831784816"/>
+      </p:ext>
+    </p:extLst>
+  </p:cSld>
+  <p:clrMapOvr>
+    <a:masterClrMapping/>
+  </p:clrMapOvr>
+</p:sld>
+</file>
+
+<file path=ppt/slides/slide27.xml><?xml version="1.0" encoding="utf-8"?>
 <p:sld xmlns:a="http://schemas.openxmlformats.org/drawingml/2006/main" xmlns:r="http://schemas.openxmlformats.org/officeDocument/2006/relationships" xmlns:p="http://schemas.openxmlformats.org/presentationml/2006/main">
   <p:cSld>
     <p:spTree>
